--- a/portfolio/presentation/interview-deck.pptx
+++ b/portfolio/presentation/interview-deck.pptx
@@ -581,7 +581,7 @@
           <a:lstStyle/>
           <a:p>
             <a:r>
-              <a:t>Close by being precise about evidence. Then switch to their world with the two questions. Only claim AI-assisted work at the level recorded in learning/ai-provenance.md.</a:t>
+              <a:t>Close by being precise about evidence. Then switch to their world with the two questions. Only claim AI-assisted work at the level recorded in your private provenance table.</a:t>
             </a:r>
           </a:p>
         </p:txBody>
